--- a/DataAnalysis_Track/decks/DA_S08_Cleaning_and_writing_down_what_you_did.pptx
+++ b/DataAnalysis_Track/decks/DA_S08_Cleaning_and_writing_down_what_you_did.pptx
@@ -480,7 +480,7 @@
 </file>
 
 <file path=ppt/notesSlides/notesSlide1.xml><?xml version="1.0" encoding="utf-8"?>
-<p:notes xmlns:a="http://schemas.openxmlformats.org/drawingml/2006/main" xmlns:p="http://schemas.openxmlformats.org/presentationml/2006/main" xmlns:r="http://schemas.openxmlformats.org/officeDocument/2006/relationships">
+<p:notes xmlns:a="http://schemas.openxmlformats.org/drawingml/2006/main" xmlns:p="http://schemas.openxmlformats.org/presentationml/2006/main">
   <p:cSld>
     <p:spTree>
       <p:nvGrpSpPr>
@@ -524,7 +524,87 @@
           <a:lstStyle/>
           <a:p>
             <a:r>
+              <a:t>TEACHING PURPOSE</a:t>
+            </a:r>
+          </a:p>
+          <a:p>
+            <a:r>
+              <a:t>Cleaning, and writing down what you did</a:t>
+            </a:r>
+          </a:p>
+          <a:p>
+            <a:r>
+              <a:t/>
+            </a:r>
+          </a:p>
+          <a:p>
+            <a:r>
+              <a:t>LECTURER CUE</a:t>
+            </a:r>
+          </a:p>
+          <a:p>
+            <a:r>
               <a:t>Start on time.</a:t>
+            </a:r>
+          </a:p>
+          <a:p>
+            <a:r>
+              <a:t/>
+            </a:r>
+          </a:p>
+          <a:p>
+            <a:r>
+              <a:t>EXPLAIN IN ORDINARY WORDS</a:t>
+            </a:r>
+          </a:p>
+          <a:p>
+            <a:r>
+              <a:t>A cleaning decision needs evidence, a stated rule and a before/after check. Similar rows may be genuine repeated events. Reconciliation compares totals built under the same definitions.</a:t>
+            </a:r>
+          </a:p>
+          <a:p>
+            <a:r>
+              <a:t/>
+            </a:r>
+          </a:p>
+          <a:p>
+            <a:r>
+              <a:t>CHECK AND EXPECTED ANSWER</a:t>
+            </a:r>
+          </a:p>
+          <a:p>
+            <a:r>
+              <a:t>May we delete every repeated amount? No. Check the row identifier and the table grain first.</a:t>
+            </a:r>
+          </a:p>
+          <a:p>
+            <a:r>
+              <a:t/>
+            </a:r>
+          </a:p>
+          <a:p>
+            <a:r>
+              <a:t>IF LEARNERS ARE STUCK</a:t>
+            </a:r>
+          </a:p>
+          <a:p>
+            <a:r>
+              <a:t>Keep raw data, record counts before and after each action, then explain any remaining difference instead of forcing totals to agree.</a:t>
+            </a:r>
+          </a:p>
+          <a:p>
+            <a:r>
+              <a:t/>
+            </a:r>
+          </a:p>
+          <a:p>
+            <a:r>
+              <a:t>NEXT</a:t>
+            </a:r>
+          </a:p>
+          <a:p>
+            <a:r>
+              <a:t>Where tonight sits. Move on after a learner can explain the current example or required action.</a:t>
             </a:r>
           </a:p>
         </p:txBody>
@@ -550,7 +630,7 @@
 </file>
 
 <file path=ppt/notesSlides/notesSlide10.xml><?xml version="1.0" encoding="utf-8"?>
-<p:notes xmlns:a="http://schemas.openxmlformats.org/drawingml/2006/main" xmlns:p="http://schemas.openxmlformats.org/presentationml/2006/main" xmlns:r="http://schemas.openxmlformats.org/officeDocument/2006/relationships">
+<p:notes xmlns:a="http://schemas.openxmlformats.org/drawingml/2006/main" xmlns:p="http://schemas.openxmlformats.org/presentationml/2006/main">
   <p:cSld>
     <p:spTree>
       <p:nvGrpSpPr>
@@ -592,7 +672,91 @@
         <p:txBody>
           <a:bodyPr/>
           <a:lstStyle/>
-          <a:p/>
+          <a:p>
+            <a:r>
+              <a:t>TEACHING PURPOSE</a:t>
+            </a:r>
+          </a:p>
+          <a:p>
+            <a:r>
+              <a:t>Duplicates, and the returns convention</a:t>
+            </a:r>
+          </a:p>
+          <a:p>
+            <a:r>
+              <a:t/>
+            </a:r>
+          </a:p>
+          <a:p>
+            <a:r>
+              <a:t>CONNECT</a:t>
+            </a:r>
+          </a:p>
+          <a:p>
+            <a:r>
+              <a:t>Build on the preceding slide: Residual.</a:t>
+            </a:r>
+          </a:p>
+          <a:p>
+            <a:r>
+              <a:t/>
+            </a:r>
+          </a:p>
+          <a:p>
+            <a:r>
+              <a:t>EXPLAIN IN ORDINARY WORDS</a:t>
+            </a:r>
+          </a:p>
+          <a:p>
+            <a:r>
+              <a:t>A cleaning decision needs evidence, a stated rule and a before/after check. Similar rows may be genuine repeated events. Reconciliation compares totals built under the same definitions.</a:t>
+            </a:r>
+          </a:p>
+          <a:p>
+            <a:r>
+              <a:t/>
+            </a:r>
+          </a:p>
+          <a:p>
+            <a:r>
+              <a:t>CHECK AND EXPECTED ANSWER</a:t>
+            </a:r>
+          </a:p>
+          <a:p>
+            <a:r>
+              <a:t>May we delete every repeated amount? No. Check the row identifier and the table grain first.</a:t>
+            </a:r>
+          </a:p>
+          <a:p>
+            <a:r>
+              <a:t/>
+            </a:r>
+          </a:p>
+          <a:p>
+            <a:r>
+              <a:t>IF LEARNERS ARE STUCK</a:t>
+            </a:r>
+          </a:p>
+          <a:p>
+            <a:r>
+              <a:t>Keep raw data, record counts before and after each action, then explain any remaining difference instead of forcing totals to agree.</a:t>
+            </a:r>
+          </a:p>
+          <a:p>
+            <a:r>
+              <a:t/>
+            </a:r>
+          </a:p>
+          <a:p>
+            <a:r>
+              <a:t>NEXT</a:t>
+            </a:r>
+          </a:p>
+          <a:p>
+            <a:r>
+              <a:t>Break. Move on after a learner can explain the current example or required action.</a:t>
+            </a:r>
+          </a:p>
         </p:txBody>
       </p:sp>
       <p:sp>
@@ -615,8 +779,8 @@
 </p:notes>
 </file>
 
-<file path=ppt/notesSlides/notesSlide11.xml><?xml version="1.0" encoding="utf-8"?>
-<p:notes xmlns:a="http://schemas.openxmlformats.org/drawingml/2006/main" xmlns:p="http://schemas.openxmlformats.org/presentationml/2006/main" xmlns:r="http://schemas.openxmlformats.org/officeDocument/2006/relationships">
+<file path=ppt/notesSlides/notesSlide10006.xml><?xml version="1.0" encoding="utf-8"?>
+<p:notes xmlns:a="http://schemas.openxmlformats.org/drawingml/2006/main" xmlns:p="http://schemas.openxmlformats.org/presentationml/2006/main">
   <p:cSld>
     <p:spTree>
       <p:nvGrpSpPr>
@@ -660,7 +824,87 @@
           <a:lstStyle/>
           <a:p>
             <a:r>
-              <a:t>Ten minutes.</a:t>
+              <a:t>TEACHING PURPOSE</a:t>
+            </a:r>
+          </a:p>
+          <a:p>
+            <a:r>
+              <a:t>Seven defects, found and fixed</a:t>
+            </a:r>
+          </a:p>
+          <a:p>
+            <a:r>
+              <a:t/>
+            </a:r>
+          </a:p>
+          <a:p>
+            <a:r>
+              <a:t>CONNECT</a:t>
+            </a:r>
+          </a:p>
+          <a:p>
+            <a:r>
+              <a:t>Build on the preceding slide: You cleaned the data and got a number..</a:t>
+            </a:r>
+          </a:p>
+          <a:p>
+            <a:r>
+              <a:t/>
+            </a:r>
+          </a:p>
+          <a:p>
+            <a:r>
+              <a:t>EXPLAIN IN ORDINARY WORDS</a:t>
+            </a:r>
+          </a:p>
+          <a:p>
+            <a:r>
+              <a:t>A category is a label, not an amount. Indicator columns record whether a row belongs to each category, usually with 0 or 1. Fit the encoding on training data and reuse it.</a:t>
+            </a:r>
+          </a:p>
+          <a:p>
+            <a:r>
+              <a:t/>
+            </a:r>
+          </a:p>
+          <a:p>
+            <a:r>
+              <a:t>CHECK AND EXPECTED ANSWER</a:t>
+            </a:r>
+          </a:p>
+          <a:p>
+            <a:r>
+              <a:t>Does assigning red=1 and blue=2 mean blue is twice red? No, those are labels.</a:t>
+            </a:r>
+          </a:p>
+          <a:p>
+            <a:r>
+              <a:t/>
+            </a:r>
+          </a:p>
+          <a:p>
+            <a:r>
+              <a:t>IF LEARNERS ARE STUCK</a:t>
+            </a:r>
+          </a:p>
+          <a:p>
+            <a:r>
+              <a:t>Make two rows and two category columns by hand before showing the encoder.</a:t>
+            </a:r>
+          </a:p>
+          <a:p>
+            <a:r>
+              <a:t/>
+            </a:r>
+          </a:p>
+          <a:p>
+            <a:r>
+              <a:t>NEXT</a:t>
+            </a:r>
+          </a:p>
+          <a:p>
+            <a:r>
+              <a:t>The seven defects in tonight's file, and what each one costs. Move on after a learner can explain the current example or required action.</a:t>
             </a:r>
           </a:p>
         </p:txBody>
@@ -685,8 +929,8 @@
 </p:notes>
 </file>
 
-<file path=ppt/notesSlides/notesSlide12.xml><?xml version="1.0" encoding="utf-8"?>
-<p:notes xmlns:a="http://schemas.openxmlformats.org/drawingml/2006/main" xmlns:p="http://schemas.openxmlformats.org/presentationml/2006/main" xmlns:r="http://schemas.openxmlformats.org/officeDocument/2006/relationships">
+<file path=ppt/notesSlides/notesSlide10013.xml><?xml version="1.0" encoding="utf-8"?>
+<p:notes xmlns:a="http://schemas.openxmlformats.org/drawingml/2006/main" xmlns:p="http://schemas.openxmlformats.org/presentationml/2006/main">
   <p:cSld>
     <p:spTree>
       <p:nvGrpSpPr>
@@ -728,7 +972,91 @@
         <p:txBody>
           <a:bodyPr/>
           <a:lstStyle/>
-          <a:p/>
+          <a:p>
+            <a:r>
+              <a:t>TEACHING PURPOSE</a:t>
+            </a:r>
+          </a:p>
+          <a:p>
+            <a:r>
+              <a:t>The decision, the log, and the reconciliation</a:t>
+            </a:r>
+          </a:p>
+          <a:p>
+            <a:r>
+              <a:t/>
+            </a:r>
+          </a:p>
+          <a:p>
+            <a:r>
+              <a:t>CONNECT</a:t>
+            </a:r>
+          </a:p>
+          <a:p>
+            <a:r>
+              <a:t>Build on the preceding slide: Break.</a:t>
+            </a:r>
+          </a:p>
+          <a:p>
+            <a:r>
+              <a:t/>
+            </a:r>
+          </a:p>
+          <a:p>
+            <a:r>
+              <a:t>EXPLAIN IN ORDINARY WORDS</a:t>
+            </a:r>
+          </a:p>
+          <a:p>
+            <a:r>
+              <a:t>A cleaning decision needs evidence, a stated rule and a before/after check. Similar rows may be genuine repeated events. Reconciliation compares totals built under the same definitions.</a:t>
+            </a:r>
+          </a:p>
+          <a:p>
+            <a:r>
+              <a:t/>
+            </a:r>
+          </a:p>
+          <a:p>
+            <a:r>
+              <a:t>CHECK AND EXPECTED ANSWER</a:t>
+            </a:r>
+          </a:p>
+          <a:p>
+            <a:r>
+              <a:t>May we delete every repeated amount? No. Check the row identifier and the table grain first.</a:t>
+            </a:r>
+          </a:p>
+          <a:p>
+            <a:r>
+              <a:t/>
+            </a:r>
+          </a:p>
+          <a:p>
+            <a:r>
+              <a:t>IF LEARNERS ARE STUCK</a:t>
+            </a:r>
+          </a:p>
+          <a:p>
+            <a:r>
+              <a:t>Keep raw data, record counts before and after each action, then explain any remaining difference instead of forcing totals to agree.</a:t>
+            </a:r>
+          </a:p>
+          <a:p>
+            <a:r>
+              <a:t/>
+            </a:r>
+          </a:p>
+          <a:p>
+            <a:r>
+              <a:t>NEXT</a:t>
+            </a:r>
+          </a:p>
+          <a:p>
+            <a:r>
+              <a:t>The defect nothing in the file tells you about. Move on after a learner can explain the current example or required action.</a:t>
+            </a:r>
+          </a:p>
         </p:txBody>
       </p:sp>
       <p:sp>
@@ -751,8 +1079,8 @@
 </p:notes>
 </file>
 
-<file path=ppt/notesSlides/notesSlide13.xml><?xml version="1.0" encoding="utf-8"?>
-<p:notes xmlns:a="http://schemas.openxmlformats.org/drawingml/2006/main" xmlns:p="http://schemas.openxmlformats.org/presentationml/2006/main" xmlns:r="http://schemas.openxmlformats.org/officeDocument/2006/relationships">
+<file path=ppt/notesSlides/notesSlide11.xml><?xml version="1.0" encoding="utf-8"?>
+<p:notes xmlns:a="http://schemas.openxmlformats.org/drawingml/2006/main" xmlns:p="http://schemas.openxmlformats.org/presentationml/2006/main">
   <p:cSld>
     <p:spTree>
       <p:nvGrpSpPr>
@@ -794,7 +1122,61 @@
         <p:txBody>
           <a:bodyPr/>
           <a:lstStyle/>
-          <a:p/>
+          <a:p>
+            <a:r>
+              <a:t>TEACHING PURPOSE</a:t>
+            </a:r>
+          </a:p>
+          <a:p>
+            <a:r>
+              <a:t>Break</a:t>
+            </a:r>
+          </a:p>
+          <a:p>
+            <a:r>
+              <a:t/>
+            </a:r>
+          </a:p>
+          <a:p>
+            <a:r>
+              <a:t>CONNECT</a:t>
+            </a:r>
+          </a:p>
+          <a:p>
+            <a:r>
+              <a:t>Build on the preceding slide: Duplicates, and the returns convention.</a:t>
+            </a:r>
+          </a:p>
+          <a:p>
+            <a:r>
+              <a:t/>
+            </a:r>
+          </a:p>
+          <a:p>
+            <a:r>
+              <a:t>LECTURER CUE</a:t>
+            </a:r>
+          </a:p>
+          <a:p>
+            <a:r>
+              <a:t>Ten minutes.</a:t>
+            </a:r>
+          </a:p>
+          <a:p>
+            <a:r>
+              <a:t/>
+            </a:r>
+          </a:p>
+          <a:p>
+            <a:r>
+              <a:t>NEXT</a:t>
+            </a:r>
+          </a:p>
+          <a:p>
+            <a:r>
+              <a:t>The decision, the log, and the reconciliation. Move on after a learner can explain the current example or required action.</a:t>
+            </a:r>
+          </a:p>
         </p:txBody>
       </p:sp>
       <p:sp>
@@ -817,8 +1199,8 @@
 </p:notes>
 </file>
 
-<file path=ppt/notesSlides/notesSlide14.xml><?xml version="1.0" encoding="utf-8"?>
-<p:notes xmlns:a="http://schemas.openxmlformats.org/drawingml/2006/main" xmlns:p="http://schemas.openxmlformats.org/presentationml/2006/main" xmlns:r="http://schemas.openxmlformats.org/officeDocument/2006/relationships">
+<file path=ppt/notesSlides/notesSlide12.xml><?xml version="1.0" encoding="utf-8"?>
+<p:notes xmlns:a="http://schemas.openxmlformats.org/drawingml/2006/main" xmlns:p="http://schemas.openxmlformats.org/presentationml/2006/main">
   <p:cSld>
     <p:spTree>
       <p:nvGrpSpPr>
@@ -860,7 +1242,91 @@
         <p:txBody>
           <a:bodyPr/>
           <a:lstStyle/>
-          <a:p/>
+          <a:p>
+            <a:r>
+              <a:t>TEACHING PURPOSE</a:t>
+            </a:r>
+          </a:p>
+          <a:p>
+            <a:r>
+              <a:t>The defect nothing in the file tells you about</a:t>
+            </a:r>
+          </a:p>
+          <a:p>
+            <a:r>
+              <a:t/>
+            </a:r>
+          </a:p>
+          <a:p>
+            <a:r>
+              <a:t>CONNECT</a:t>
+            </a:r>
+          </a:p>
+          <a:p>
+            <a:r>
+              <a:t>Build on the preceding slide: The decision, the log, and the reconciliation.</a:t>
+            </a:r>
+          </a:p>
+          <a:p>
+            <a:r>
+              <a:t/>
+            </a:r>
+          </a:p>
+          <a:p>
+            <a:r>
+              <a:t>EXPLAIN IN ORDINARY WORDS</a:t>
+            </a:r>
+          </a:p>
+          <a:p>
+            <a:r>
+              <a:t>Grain means what one row represents. A key identifies a row; a primary key may use more than one column. A join matches keys, and multiple matches can multiply rows.</a:t>
+            </a:r>
+          </a:p>
+          <a:p>
+            <a:r>
+              <a:t/>
+            </a:r>
+          </a:p>
+          <a:p>
+            <a:r>
+              <a:t>CHECK AND EXPECTED ANSWER</a:t>
+            </a:r>
+          </a:p>
+          <a:p>
+            <a:r>
+              <a:t>One order has two lines. After joining orders to lines, how many rows for it? Two. Summing a repeated order-level total would double-count.</a:t>
+            </a:r>
+          </a:p>
+          <a:p>
+            <a:r>
+              <a:t/>
+            </a:r>
+          </a:p>
+          <a:p>
+            <a:r>
+              <a:t>IF LEARNERS ARE STUCK</a:t>
+            </a:r>
+          </a:p>
+          <a:p>
+            <a:r>
+              <a:t>Write one example row from each table. Circle keys and trace each match. Aggregate to the intended grain and check counts and totals.</a:t>
+            </a:r>
+          </a:p>
+          <a:p>
+            <a:r>
+              <a:t/>
+            </a:r>
+          </a:p>
+          <a:p>
+            <a:r>
+              <a:t>NEXT</a:t>
+            </a:r>
+          </a:p>
+          <a:p>
+            <a:r>
+              <a:t>Two date formats in one column. Move on after a learner can explain the current example or required action.</a:t>
+            </a:r>
+          </a:p>
         </p:txBody>
       </p:sp>
       <p:sp>
@@ -883,8 +1349,8 @@
 </p:notes>
 </file>
 
-<file path=ppt/notesSlides/notesSlide15.xml><?xml version="1.0" encoding="utf-8"?>
-<p:notes xmlns:a="http://schemas.openxmlformats.org/drawingml/2006/main" xmlns:p="http://schemas.openxmlformats.org/presentationml/2006/main" xmlns:r="http://schemas.openxmlformats.org/officeDocument/2006/relationships">
+<file path=ppt/notesSlides/notesSlide13.xml><?xml version="1.0" encoding="utf-8"?>
+<p:notes xmlns:a="http://schemas.openxmlformats.org/drawingml/2006/main" xmlns:p="http://schemas.openxmlformats.org/presentationml/2006/main">
   <p:cSld>
     <p:spTree>
       <p:nvGrpSpPr>
@@ -928,7 +1394,87 @@
           <a:lstStyle/>
           <a:p>
             <a:r>
-              <a:t>Cleaning until the number looks right. The log exists to make that visible, including to yourself.</a:t>
+              <a:t>TEACHING PURPOSE</a:t>
+            </a:r>
+          </a:p>
+          <a:p>
+            <a:r>
+              <a:t>Two date formats in one column</a:t>
+            </a:r>
+          </a:p>
+          <a:p>
+            <a:r>
+              <a:t/>
+            </a:r>
+          </a:p>
+          <a:p>
+            <a:r>
+              <a:t>CONNECT</a:t>
+            </a:r>
+          </a:p>
+          <a:p>
+            <a:r>
+              <a:t>Build on the preceding slide: The defect nothing in the file tells you about.</a:t>
+            </a:r>
+          </a:p>
+          <a:p>
+            <a:r>
+              <a:t/>
+            </a:r>
+          </a:p>
+          <a:p>
+            <a:r>
+              <a:t>EXPLAIN IN ORDINARY WORDS</a:t>
+            </a:r>
+          </a:p>
+          <a:p>
+            <a:r>
+              <a:t>A CSV is a text table. The header supplies column names. With csv.DictReader, values start as text, even if they look like numbers. A path tells Python where the file is.</a:t>
+            </a:r>
+          </a:p>
+          <a:p>
+            <a:r>
+              <a:t/>
+            </a:r>
+          </a:p>
+          <a:p>
+            <a:r>
+              <a:t>CHECK AND EXPECTED ANSWER</a:t>
+            </a:r>
+          </a:p>
+          <a:p>
+            <a:r>
+              <a:t>Can "2.5" from csv.DictReader be added as a number without conversion? No; convert valid numeric text first.</a:t>
+            </a:r>
+          </a:p>
+          <a:p>
+            <a:r>
+              <a:t/>
+            </a:r>
+          </a:p>
+          <a:p>
+            <a:r>
+              <a:t>IF LEARNERS ARE STUCK</a:t>
+            </a:r>
+          </a:p>
+          <a:p>
+            <a:r>
+              <a:t>Show the file in the runtime folder and compare its exact filename, case and column headers. Upload data again after a fresh Colab runtime.</a:t>
+            </a:r>
+          </a:p>
+          <a:p>
+            <a:r>
+              <a:t/>
+            </a:r>
+          </a:p>
+          <a:p>
+            <a:r>
+              <a:t>NEXT</a:t>
+            </a:r>
+          </a:p>
+          <a:p>
+            <a:r>
+              <a:t>The reconciliation does not come out exact, and that is the lesson. Move on after a learner can explain the current example or required action.</a:t>
             </a:r>
           </a:p>
         </p:txBody>
@@ -953,8 +1499,8 @@
 </p:notes>
 </file>
 
-<file path=ppt/notesSlides/notesSlide16.xml><?xml version="1.0" encoding="utf-8"?>
-<p:notes xmlns:a="http://schemas.openxmlformats.org/drawingml/2006/main" xmlns:p="http://schemas.openxmlformats.org/presentationml/2006/main" xmlns:r="http://schemas.openxmlformats.org/officeDocument/2006/relationships">
+<file path=ppt/notesSlides/notesSlide14.xml><?xml version="1.0" encoding="utf-8"?>
+<p:notes xmlns:a="http://schemas.openxmlformats.org/drawingml/2006/main" xmlns:p="http://schemas.openxmlformats.org/presentationml/2006/main">
   <p:cSld>
     <p:spTree>
       <p:nvGrpSpPr>
@@ -996,7 +1542,91 @@
         <p:txBody>
           <a:bodyPr/>
           <a:lstStyle/>
-          <a:p/>
+          <a:p>
+            <a:r>
+              <a:t>TEACHING PURPOSE</a:t>
+            </a:r>
+          </a:p>
+          <a:p>
+            <a:r>
+              <a:t>The reconciliation does not come out exact, and that is the lesson</a:t>
+            </a:r>
+          </a:p>
+          <a:p>
+            <a:r>
+              <a:t/>
+            </a:r>
+          </a:p>
+          <a:p>
+            <a:r>
+              <a:t>CONNECT</a:t>
+            </a:r>
+          </a:p>
+          <a:p>
+            <a:r>
+              <a:t>Build on the preceding slide: Two date formats in one column.</a:t>
+            </a:r>
+          </a:p>
+          <a:p>
+            <a:r>
+              <a:t/>
+            </a:r>
+          </a:p>
+          <a:p>
+            <a:r>
+              <a:t>EXPLAIN IN ORDINARY WORDS</a:t>
+            </a:r>
+          </a:p>
+          <a:p>
+            <a:r>
+              <a:t>A cleaning decision needs evidence, a stated rule and a before/after check. Similar rows may be genuine repeated events. Reconciliation compares totals built under the same definitions.</a:t>
+            </a:r>
+          </a:p>
+          <a:p>
+            <a:r>
+              <a:t/>
+            </a:r>
+          </a:p>
+          <a:p>
+            <a:r>
+              <a:t>CHECK AND EXPECTED ANSWER</a:t>
+            </a:r>
+          </a:p>
+          <a:p>
+            <a:r>
+              <a:t>May we delete every repeated amount? No. Check the row identifier and the table grain first.</a:t>
+            </a:r>
+          </a:p>
+          <a:p>
+            <a:r>
+              <a:t/>
+            </a:r>
+          </a:p>
+          <a:p>
+            <a:r>
+              <a:t>IF LEARNERS ARE STUCK</a:t>
+            </a:r>
+          </a:p>
+          <a:p>
+            <a:r>
+              <a:t>Keep raw data, record counts before and after each action, then explain any remaining difference instead of forcing totals to agree.</a:t>
+            </a:r>
+          </a:p>
+          <a:p>
+            <a:r>
+              <a:t/>
+            </a:r>
+          </a:p>
+          <a:p>
+            <a:r>
+              <a:t>NEXT</a:t>
+            </a:r>
+          </a:p>
+          <a:p>
+            <a:r>
+              <a:t>Cleaning until the number looks right. The log exists to make that visible, including to yourself.. Move on after a learner can explain the current example or required action.</a:t>
+            </a:r>
+          </a:p>
         </p:txBody>
       </p:sp>
       <p:sp>
@@ -1019,8 +1649,8 @@
 </p:notes>
 </file>
 
-<file path=ppt/notesSlides/notesSlide17.xml><?xml version="1.0" encoding="utf-8"?>
-<p:notes xmlns:a="http://schemas.openxmlformats.org/drawingml/2006/main" xmlns:p="http://schemas.openxmlformats.org/presentationml/2006/main" xmlns:r="http://schemas.openxmlformats.org/officeDocument/2006/relationships">
+<file path=ppt/notesSlides/notesSlide15.xml><?xml version="1.0" encoding="utf-8"?>
+<p:notes xmlns:a="http://schemas.openxmlformats.org/drawingml/2006/main" xmlns:p="http://schemas.openxmlformats.org/presentationml/2006/main">
   <p:cSld>
     <p:spTree>
       <p:nvGrpSpPr>
@@ -1062,7 +1692,106 @@
         <p:txBody>
           <a:bodyPr/>
           <a:lstStyle/>
-          <a:p/>
+          <a:p>
+            <a:r>
+              <a:t>TEACHING PURPOSE</a:t>
+            </a:r>
+          </a:p>
+          <a:p>
+            <a:r>
+              <a:t>Cleaning until the number looks right. The log exists to make that visible, including to yourself.</a:t>
+            </a:r>
+          </a:p>
+          <a:p>
+            <a:r>
+              <a:t/>
+            </a:r>
+          </a:p>
+          <a:p>
+            <a:r>
+              <a:t>CONNECT</a:t>
+            </a:r>
+          </a:p>
+          <a:p>
+            <a:r>
+              <a:t>Build on the preceding slide: The reconciliation does not come out exact, and that is the lesson.</a:t>
+            </a:r>
+          </a:p>
+          <a:p>
+            <a:r>
+              <a:t/>
+            </a:r>
+          </a:p>
+          <a:p>
+            <a:r>
+              <a:t>LECTURER CUE</a:t>
+            </a:r>
+          </a:p>
+          <a:p>
+            <a:r>
+              <a:t>Cleaning until the number looks right. The log exists to make that visible, including to yourself.</a:t>
+            </a:r>
+          </a:p>
+          <a:p>
+            <a:r>
+              <a:t/>
+            </a:r>
+          </a:p>
+          <a:p>
+            <a:r>
+              <a:t>EXPLAIN IN ORDINARY WORDS</a:t>
+            </a:r>
+          </a:p>
+          <a:p>
+            <a:r>
+              <a:t>A cleaning decision needs evidence, a stated rule and a before/after check. Similar rows may be genuine repeated events. Reconciliation compares totals built under the same definitions.</a:t>
+            </a:r>
+          </a:p>
+          <a:p>
+            <a:r>
+              <a:t/>
+            </a:r>
+          </a:p>
+          <a:p>
+            <a:r>
+              <a:t>CHECK AND EXPECTED ANSWER</a:t>
+            </a:r>
+          </a:p>
+          <a:p>
+            <a:r>
+              <a:t>May we delete every repeated amount? No. Check the row identifier and the table grain first.</a:t>
+            </a:r>
+          </a:p>
+          <a:p>
+            <a:r>
+              <a:t/>
+            </a:r>
+          </a:p>
+          <a:p>
+            <a:r>
+              <a:t>IF LEARNERS ARE STUCK</a:t>
+            </a:r>
+          </a:p>
+          <a:p>
+            <a:r>
+              <a:t>Keep raw data, record counts before and after each action, then explain any remaining difference instead of forcing totals to agree.</a:t>
+            </a:r>
+          </a:p>
+          <a:p>
+            <a:r>
+              <a:t/>
+            </a:r>
+          </a:p>
+          <a:p>
+            <a:r>
+              <a:t>NEXT</a:t>
+            </a:r>
+          </a:p>
+          <a:p>
+            <a:r>
+              <a:t>Can you answer these?. Move on after a learner can explain the current example or required action.</a:t>
+            </a:r>
+          </a:p>
         </p:txBody>
       </p:sp>
       <p:sp>
@@ -1085,8 +1814,8 @@
 </p:notes>
 </file>
 
-<file path=ppt/notesSlides/notesSlide18.xml><?xml version="1.0" encoding="utf-8"?>
-<p:notes xmlns:a="http://schemas.openxmlformats.org/drawingml/2006/main" xmlns:p="http://schemas.openxmlformats.org/presentationml/2006/main" xmlns:r="http://schemas.openxmlformats.org/officeDocument/2006/relationships">
+<file path=ppt/notesSlides/notesSlide16.xml><?xml version="1.0" encoding="utf-8"?>
+<p:notes xmlns:a="http://schemas.openxmlformats.org/drawingml/2006/main" xmlns:p="http://schemas.openxmlformats.org/presentationml/2006/main">
   <p:cSld>
     <p:spTree>
       <p:nvGrpSpPr>
@@ -1130,7 +1859,157 @@
           <a:lstStyle/>
           <a:p>
             <a:r>
-              <a:t>From the raw CSVs to a revenue figure you can defend, keeping the log as you go rather than writing it afterwards. The log is marked as heavily as the number.</a:t>
+              <a:t>TEACHING PURPOSE</a:t>
+            </a:r>
+          </a:p>
+          <a:p>
+            <a:r>
+              <a:t>Can you answer these?</a:t>
+            </a:r>
+          </a:p>
+          <a:p>
+            <a:r>
+              <a:t/>
+            </a:r>
+          </a:p>
+          <a:p>
+            <a:r>
+              <a:t>CONNECT</a:t>
+            </a:r>
+          </a:p>
+          <a:p>
+            <a:r>
+              <a:t>Build on the preceding slide: Cleaning until the number looks right. The log exists to make that visible, including to yourself..</a:t>
+            </a:r>
+          </a:p>
+          <a:p>
+            <a:r>
+              <a:t/>
+            </a:r>
+          </a:p>
+          <a:p>
+            <a:r>
+              <a:t>EXPLAIN IN ORDINARY WORDS</a:t>
+            </a:r>
+          </a:p>
+          <a:p>
+            <a:r>
+              <a:t>Missing means not recorded, not automatically zero. Decide why it is missing and document the rule. Fitted fill values must come from training data when evaluating a model.</a:t>
+            </a:r>
+          </a:p>
+          <a:p>
+            <a:r>
+              <a:t/>
+            </a:r>
+          </a:p>
+          <a:p>
+            <a:r>
+              <a:t>CHECK AND EXPECTED ANSWER</a:t>
+            </a:r>
+          </a:p>
+          <a:p>
+            <a:r>
+              <a:t>Is an unrecorded energy reading evidence of zero consumption? No.</a:t>
+            </a:r>
+          </a:p>
+          <a:p>
+            <a:r>
+              <a:t/>
+            </a:r>
+          </a:p>
+          <a:p>
+            <a:r>
+              <a:t>IF LEARNERS ARE STUCK</a:t>
+            </a:r>
+          </a:p>
+          <a:p>
+            <a:r>
+              <a:t>Use three rows: a recorded zero, a recorded positive value and a blank. Explain their different meanings before cleaning.</a:t>
+            </a:r>
+          </a:p>
+          <a:p>
+            <a:r>
+              <a:t/>
+            </a:r>
+          </a:p>
+          <a:p>
+            <a:r>
+              <a:t>DISCUSSION KEY FOR THIS SLIDE</a:t>
+            </a:r>
+          </a:p>
+          <a:p>
+            <a:r>
+              <a:t>ANSWERS</a:t>
+            </a:r>
+          </a:p>
+          <a:p>
+            <a:r>
+              <a:t>How did you do?</a:t>
+            </a:r>
+          </a:p>
+          <a:p>
+            <a:r>
+              <a:t>A</a:t>
+            </a:r>
+          </a:p>
+          <a:p>
+            <a:r>
+              <a:t>When a duplicate is not an error</a:t>
+            </a:r>
+          </a:p>
+          <a:p>
+            <a:r>
+              <a:t>When the grain allows it: two identical payments on one day are two real payments. On an order line it is an error, because the same product twice on one order would be one line with quantity 2. The grain decides, which is why session 1 spent an hour on it.</a:t>
+            </a:r>
+          </a:p>
+          <a:p>
+            <a:r>
+              <a:t>B</a:t>
+            </a:r>
+          </a:p>
+          <a:p>
+            <a:r>
+              <a:t>Finding a currency defect unaided</a:t>
+            </a:r>
+          </a:p>
+          <a:p>
+            <a:r>
+              <a:t>Ask what a price should look like, then check min and max per category. A category whose prices are a thousandth of everything else is not a cheap category. Domain sense is the detector; there is no error message.</a:t>
+            </a:r>
+          </a:p>
+          <a:p>
+            <a:r>
+              <a:t>C</a:t>
+            </a:r>
+          </a:p>
+          <a:p>
+            <a:r>
+              <a:t>Why a missing customer id is a decision</a:t>
+            </a:r>
+          </a:p>
+          <a:p>
+            <a:r>
+              <a:t>Because both answers are defensible and they give different numbers. Dropping those orders loses UGX 390,632,335; keeping them means every per-customer analysis has a gap you must state. What is not defensible is doing either one silently.</a:t>
+            </a:r>
+          </a:p>
+          <a:p>
+            <a:r>
+              <a:t>Let learners attempt first; use this to explain the reasoning, not just reveal the answer.</a:t>
+            </a:r>
+          </a:p>
+          <a:p>
+            <a:r>
+              <a:t/>
+            </a:r>
+          </a:p>
+          <a:p>
+            <a:r>
+              <a:t>NEXT</a:t>
+            </a:r>
+          </a:p>
+          <a:p>
+            <a:r>
+              <a:t>How did you do?. Move on after a learner can explain the current example or required action.</a:t>
             </a:r>
           </a:p>
         </p:txBody>
@@ -1155,8 +2034,8 @@
 </p:notes>
 </file>
 
-<file path=ppt/notesSlides/notesSlide19.xml><?xml version="1.0" encoding="utf-8"?>
-<p:notes xmlns:a="http://schemas.openxmlformats.org/drawingml/2006/main" xmlns:p="http://schemas.openxmlformats.org/presentationml/2006/main" xmlns:r="http://schemas.openxmlformats.org/officeDocument/2006/relationships">
+<file path=ppt/notesSlides/notesSlide17.xml><?xml version="1.0" encoding="utf-8"?>
+<p:notes xmlns:a="http://schemas.openxmlformats.org/drawingml/2006/main" xmlns:p="http://schemas.openxmlformats.org/presentationml/2006/main">
   <p:cSld>
     <p:spTree>
       <p:nvGrpSpPr>
@@ -1198,7 +2077,91 @@
         <p:txBody>
           <a:bodyPr/>
           <a:lstStyle/>
-          <a:p/>
+          <a:p>
+            <a:r>
+              <a:t>TEACHING PURPOSE</a:t>
+            </a:r>
+          </a:p>
+          <a:p>
+            <a:r>
+              <a:t>How did you do?</a:t>
+            </a:r>
+          </a:p>
+          <a:p>
+            <a:r>
+              <a:t/>
+            </a:r>
+          </a:p>
+          <a:p>
+            <a:r>
+              <a:t>CONNECT</a:t>
+            </a:r>
+          </a:p>
+          <a:p>
+            <a:r>
+              <a:t>Build on the preceding slide: Can you answer these?.</a:t>
+            </a:r>
+          </a:p>
+          <a:p>
+            <a:r>
+              <a:t/>
+            </a:r>
+          </a:p>
+          <a:p>
+            <a:r>
+              <a:t>EXPLAIN IN ORDINARY WORDS</a:t>
+            </a:r>
+          </a:p>
+          <a:p>
+            <a:r>
+              <a:t>Grain means what one row represents. A key identifies a row; a primary key may use more than one column. A join matches keys, and multiple matches can multiply rows.</a:t>
+            </a:r>
+          </a:p>
+          <a:p>
+            <a:r>
+              <a:t/>
+            </a:r>
+          </a:p>
+          <a:p>
+            <a:r>
+              <a:t>CHECK AND EXPECTED ANSWER</a:t>
+            </a:r>
+          </a:p>
+          <a:p>
+            <a:r>
+              <a:t>One order has two lines. After joining orders to lines, how many rows for it? Two. Summing a repeated order-level total would double-count.</a:t>
+            </a:r>
+          </a:p>
+          <a:p>
+            <a:r>
+              <a:t/>
+            </a:r>
+          </a:p>
+          <a:p>
+            <a:r>
+              <a:t>IF LEARNERS ARE STUCK</a:t>
+            </a:r>
+          </a:p>
+          <a:p>
+            <a:r>
+              <a:t>Write one example row from each table. Circle keys and trace each match. Aggregate to the intended grain and check counts and totals.</a:t>
+            </a:r>
+          </a:p>
+          <a:p>
+            <a:r>
+              <a:t/>
+            </a:r>
+          </a:p>
+          <a:p>
+            <a:r>
+              <a:t>NEXT</a:t>
+            </a:r>
+          </a:p>
+          <a:p>
+            <a:r>
+              <a:t>Clean it, log it, reconcile it. Move on after a learner can explain the current example or required action.</a:t>
+            </a:r>
+          </a:p>
         </p:txBody>
       </p:sp>
       <p:sp>
@@ -1221,8 +2184,8 @@
 </p:notes>
 </file>
 
-<file path=ppt/notesSlides/notesSlide2.xml><?xml version="1.0" encoding="utf-8"?>
-<p:notes xmlns:a="http://schemas.openxmlformats.org/drawingml/2006/main" xmlns:p="http://schemas.openxmlformats.org/presentationml/2006/main" xmlns:r="http://schemas.openxmlformats.org/officeDocument/2006/relationships">
+<file path=ppt/notesSlides/notesSlide18.xml><?xml version="1.0" encoding="utf-8"?>
+<p:notes xmlns:a="http://schemas.openxmlformats.org/drawingml/2006/main" xmlns:p="http://schemas.openxmlformats.org/presentationml/2006/main">
   <p:cSld>
     <p:spTree>
       <p:nvGrpSpPr>
@@ -1266,7 +2229,102 @@
           <a:lstStyle/>
           <a:p>
             <a:r>
-              <a:t>Tonight is session 8 of twelve.</a:t>
+              <a:t>TEACHING PURPOSE</a:t>
+            </a:r>
+          </a:p>
+          <a:p>
+            <a:r>
+              <a:t>Clean it, log it, reconcile it</a:t>
+            </a:r>
+          </a:p>
+          <a:p>
+            <a:r>
+              <a:t/>
+            </a:r>
+          </a:p>
+          <a:p>
+            <a:r>
+              <a:t>CONNECT</a:t>
+            </a:r>
+          </a:p>
+          <a:p>
+            <a:r>
+              <a:t>Build on the preceding slide: How did you do?.</a:t>
+            </a:r>
+          </a:p>
+          <a:p>
+            <a:r>
+              <a:t/>
+            </a:r>
+          </a:p>
+          <a:p>
+            <a:r>
+              <a:t>LECTURER CUE</a:t>
+            </a:r>
+          </a:p>
+          <a:p>
+            <a:r>
+              <a:t>From the raw CSVs to a revenue figure you can defend, keeping the log as you go rather than writing it afterwards. The log is marked as heavily as the number.</a:t>
+            </a:r>
+          </a:p>
+          <a:p>
+            <a:r>
+              <a:t/>
+            </a:r>
+          </a:p>
+          <a:p>
+            <a:r>
+              <a:t>EXPLAIN IN ORDINARY WORDS</a:t>
+            </a:r>
+          </a:p>
+          <a:p>
+            <a:r>
+              <a:t>A cleaning decision needs evidence, a stated rule and a before/after check. Similar rows may be genuine repeated events. Reconciliation compares totals built under the same definitions.</a:t>
+            </a:r>
+          </a:p>
+          <a:p>
+            <a:r>
+              <a:t/>
+            </a:r>
+          </a:p>
+          <a:p>
+            <a:r>
+              <a:t>CHECK AND EXPECTED ANSWER</a:t>
+            </a:r>
+          </a:p>
+          <a:p>
+            <a:r>
+              <a:t>May we delete every repeated amount? No. Check the row identifier and the table grain first.</a:t>
+            </a:r>
+          </a:p>
+          <a:p>
+            <a:r>
+              <a:t/>
+            </a:r>
+          </a:p>
+          <a:p>
+            <a:r>
+              <a:t>IF LEARNERS ARE STUCK</a:t>
+            </a:r>
+          </a:p>
+          <a:p>
+            <a:r>
+              <a:t>Keep raw data, record counts before and after each action, then explain any remaining difference instead of forcing totals to agree.</a:t>
+            </a:r>
+          </a:p>
+          <a:p>
+            <a:r>
+              <a:t/>
+            </a:r>
+          </a:p>
+          <a:p>
+            <a:r>
+              <a:t>NEXT</a:t>
+            </a:r>
+          </a:p>
+          <a:p>
+            <a:r>
+              <a:t>What you can do now. Move on after a learner can explain the current example or required action.</a:t>
             </a:r>
           </a:p>
         </p:txBody>
@@ -1291,8 +2349,8 @@
 </p:notes>
 </file>
 
-<file path=ppt/notesSlides/notesSlide20.xml><?xml version="1.0" encoding="utf-8"?>
-<p:notes xmlns:a="http://schemas.openxmlformats.org/drawingml/2006/main" xmlns:p="http://schemas.openxmlformats.org/presentationml/2006/main" xmlns:r="http://schemas.openxmlformats.org/officeDocument/2006/relationships">
+<file path=ppt/notesSlides/notesSlide19.xml><?xml version="1.0" encoding="utf-8"?>
+<p:notes xmlns:a="http://schemas.openxmlformats.org/drawingml/2006/main" xmlns:p="http://schemas.openxmlformats.org/presentationml/2006/main">
   <p:cSld>
     <p:spTree>
       <p:nvGrpSpPr>
@@ -1336,7 +2394,87 @@
           <a:lstStyle/>
           <a:p>
             <a:r>
-              <a:t>Clean your own file, or the retail file, with a log. State one decision you are not sure about and why. Uncertainty written down is worth more than a confident wrong number.</a:t>
+              <a:t>TEACHING PURPOSE</a:t>
+            </a:r>
+          </a:p>
+          <a:p>
+            <a:r>
+              <a:t>What you can do now</a:t>
+            </a:r>
+          </a:p>
+          <a:p>
+            <a:r>
+              <a:t/>
+            </a:r>
+          </a:p>
+          <a:p>
+            <a:r>
+              <a:t>CONNECT</a:t>
+            </a:r>
+          </a:p>
+          <a:p>
+            <a:r>
+              <a:t>Build on the preceding slide: Clean it, log it, reconcile it.</a:t>
+            </a:r>
+          </a:p>
+          <a:p>
+            <a:r>
+              <a:t/>
+            </a:r>
+          </a:p>
+          <a:p>
+            <a:r>
+              <a:t>EXPLAIN IN ORDINARY WORDS</a:t>
+            </a:r>
+          </a:p>
+          <a:p>
+            <a:r>
+              <a:t>Missing means not recorded, not automatically zero. Decide why it is missing and document the rule. Fitted fill values must come from training data when evaluating a model.</a:t>
+            </a:r>
+          </a:p>
+          <a:p>
+            <a:r>
+              <a:t/>
+            </a:r>
+          </a:p>
+          <a:p>
+            <a:r>
+              <a:t>CHECK AND EXPECTED ANSWER</a:t>
+            </a:r>
+          </a:p>
+          <a:p>
+            <a:r>
+              <a:t>Is an unrecorded energy reading evidence of zero consumption? No.</a:t>
+            </a:r>
+          </a:p>
+          <a:p>
+            <a:r>
+              <a:t/>
+            </a:r>
+          </a:p>
+          <a:p>
+            <a:r>
+              <a:t>IF LEARNERS ARE STUCK</a:t>
+            </a:r>
+          </a:p>
+          <a:p>
+            <a:r>
+              <a:t>Use three rows: a recorded zero, a recorded positive value and a blank. Explain their different meanings before cleaning.</a:t>
+            </a:r>
+          </a:p>
+          <a:p>
+            <a:r>
+              <a:t/>
+            </a:r>
+          </a:p>
+          <a:p>
+            <a:r>
+              <a:t>NEXT</a:t>
+            </a:r>
+          </a:p>
+          <a:p>
+            <a:r>
+              <a:t>Before the next session. Move on after a learner can explain the current example or required action.</a:t>
             </a:r>
           </a:p>
         </p:txBody>
@@ -1361,8 +2499,8 @@
 </p:notes>
 </file>
 
-<file path=ppt/notesSlides/notesSlide21.xml><?xml version="1.0" encoding="utf-8"?>
-<p:notes xmlns:a="http://schemas.openxmlformats.org/drawingml/2006/main" xmlns:p="http://schemas.openxmlformats.org/presentationml/2006/main" xmlns:r="http://schemas.openxmlformats.org/officeDocument/2006/relationships">
+<file path=ppt/notesSlides/notesSlide2.xml><?xml version="1.0" encoding="utf-8"?>
+<p:notes xmlns:a="http://schemas.openxmlformats.org/drawingml/2006/main" xmlns:p="http://schemas.openxmlformats.org/presentationml/2006/main">
   <p:cSld>
     <p:spTree>
       <p:nvGrpSpPr>
@@ -1406,7 +2544,102 @@
           <a:lstStyle/>
           <a:p>
             <a:r>
-              <a:t>In six months the person who cannot reproduce it will be you. The log costs five minutes while you work and saves an afternoon later, which is the best trade available in this course.</a:t>
+              <a:t>TEACHING PURPOSE</a:t>
+            </a:r>
+          </a:p>
+          <a:p>
+            <a:r>
+              <a:t>Where tonight sits</a:t>
+            </a:r>
+          </a:p>
+          <a:p>
+            <a:r>
+              <a:t/>
+            </a:r>
+          </a:p>
+          <a:p>
+            <a:r>
+              <a:t>CONNECT</a:t>
+            </a:r>
+          </a:p>
+          <a:p>
+            <a:r>
+              <a:t>Build on the preceding slide: Cleaning, and writing down what you did.</a:t>
+            </a:r>
+          </a:p>
+          <a:p>
+            <a:r>
+              <a:t/>
+            </a:r>
+          </a:p>
+          <a:p>
+            <a:r>
+              <a:t>LECTURER CUE</a:t>
+            </a:r>
+          </a:p>
+          <a:p>
+            <a:r>
+              <a:t>Tonight is session 8 of fifteen.</a:t>
+            </a:r>
+          </a:p>
+          <a:p>
+            <a:r>
+              <a:t/>
+            </a:r>
+          </a:p>
+          <a:p>
+            <a:r>
+              <a:t>EXPLAIN IN ORDINARY WORDS</a:t>
+            </a:r>
+          </a:p>
+          <a:p>
+            <a:r>
+              <a:t>Grain means what one row represents. A key identifies a row; a primary key may use more than one column. A join matches keys, and multiple matches can multiply rows.</a:t>
+            </a:r>
+          </a:p>
+          <a:p>
+            <a:r>
+              <a:t/>
+            </a:r>
+          </a:p>
+          <a:p>
+            <a:r>
+              <a:t>CHECK AND EXPECTED ANSWER</a:t>
+            </a:r>
+          </a:p>
+          <a:p>
+            <a:r>
+              <a:t>One order has two lines. After joining orders to lines, how many rows for it? Two. Summing a repeated order-level total would double-count.</a:t>
+            </a:r>
+          </a:p>
+          <a:p>
+            <a:r>
+              <a:t/>
+            </a:r>
+          </a:p>
+          <a:p>
+            <a:r>
+              <a:t>IF LEARNERS ARE STUCK</a:t>
+            </a:r>
+          </a:p>
+          <a:p>
+            <a:r>
+              <a:t>Write one example row from each table. Circle keys and trace each match. Aggregate to the intended grain and check counts and totals.</a:t>
+            </a:r>
+          </a:p>
+          <a:p>
+            <a:r>
+              <a:t/>
+            </a:r>
+          </a:p>
+          <a:p>
+            <a:r>
+              <a:t>NEXT</a:t>
+            </a:r>
+          </a:p>
+          <a:p>
+            <a:r>
+              <a:t>The words for tonight. Move on after a learner can explain the current example or required action.</a:t>
             </a:r>
           </a:p>
         </p:txBody>
@@ -1431,8 +2664,8 @@
 </p:notes>
 </file>
 
-<file path=ppt/notesSlides/notesSlide3.xml><?xml version="1.0" encoding="utf-8"?>
-<p:notes xmlns:a="http://schemas.openxmlformats.org/drawingml/2006/main" xmlns:p="http://schemas.openxmlformats.org/presentationml/2006/main" xmlns:r="http://schemas.openxmlformats.org/officeDocument/2006/relationships">
+<file path=ppt/notesSlides/notesSlide20.xml><?xml version="1.0" encoding="utf-8"?>
+<p:notes xmlns:a="http://schemas.openxmlformats.org/drawingml/2006/main" xmlns:p="http://schemas.openxmlformats.org/presentationml/2006/main">
   <p:cSld>
     <p:spTree>
       <p:nvGrpSpPr>
@@ -1474,7 +2707,61 @@
         <p:txBody>
           <a:bodyPr/>
           <a:lstStyle/>
-          <a:p/>
+          <a:p>
+            <a:r>
+              <a:t>TEACHING PURPOSE</a:t>
+            </a:r>
+          </a:p>
+          <a:p>
+            <a:r>
+              <a:t>Before the next session</a:t>
+            </a:r>
+          </a:p>
+          <a:p>
+            <a:r>
+              <a:t/>
+            </a:r>
+          </a:p>
+          <a:p>
+            <a:r>
+              <a:t>CONNECT</a:t>
+            </a:r>
+          </a:p>
+          <a:p>
+            <a:r>
+              <a:t>Build on the preceding slide: What you can do now.</a:t>
+            </a:r>
+          </a:p>
+          <a:p>
+            <a:r>
+              <a:t/>
+            </a:r>
+          </a:p>
+          <a:p>
+            <a:r>
+              <a:t>LECTURER CUE</a:t>
+            </a:r>
+          </a:p>
+          <a:p>
+            <a:r>
+              <a:t>Clean your own file, or the retail file, with a log. State one decision you are not sure about and why. Uncertainty written down is worth more than a confident wrong number.</a:t>
+            </a:r>
+          </a:p>
+          <a:p>
+            <a:r>
+              <a:t/>
+            </a:r>
+          </a:p>
+          <a:p>
+            <a:r>
+              <a:t>NEXT</a:t>
+            </a:r>
+          </a:p>
+          <a:p>
+            <a:r>
+              <a:t>A number nobody can reproduce is not a result. Move on after a learner can explain the current example or required action.</a:t>
+            </a:r>
+          </a:p>
         </p:txBody>
       </p:sp>
       <p:sp>
@@ -1497,8 +2784,8 @@
 </p:notes>
 </file>
 
-<file path=ppt/notesSlides/notesSlide4.xml><?xml version="1.0" encoding="utf-8"?>
-<p:notes xmlns:a="http://schemas.openxmlformats.org/drawingml/2006/main" xmlns:p="http://schemas.openxmlformats.org/presentationml/2006/main" xmlns:r="http://schemas.openxmlformats.org/officeDocument/2006/relationships">
+<file path=ppt/notesSlides/notesSlide21.xml><?xml version="1.0" encoding="utf-8"?>
+<p:notes xmlns:a="http://schemas.openxmlformats.org/drawingml/2006/main" xmlns:p="http://schemas.openxmlformats.org/presentationml/2006/main">
   <p:cSld>
     <p:spTree>
       <p:nvGrpSpPr>
@@ -1542,7 +2829,87 @@
           <a:lstStyle/>
           <a:p>
             <a:r>
-              <a:t>These three are what tonight is marked against, in the sense that the lab checks them.</a:t>
+              <a:t>TEACHING PURPOSE</a:t>
+            </a:r>
+          </a:p>
+          <a:p>
+            <a:r>
+              <a:t>A number nobody can reproduce is not a result</a:t>
+            </a:r>
+          </a:p>
+          <a:p>
+            <a:r>
+              <a:t/>
+            </a:r>
+          </a:p>
+          <a:p>
+            <a:r>
+              <a:t>CONNECT</a:t>
+            </a:r>
+          </a:p>
+          <a:p>
+            <a:r>
+              <a:t>Build on the preceding slide: Before the next session.</a:t>
+            </a:r>
+          </a:p>
+          <a:p>
+            <a:r>
+              <a:t/>
+            </a:r>
+          </a:p>
+          <a:p>
+            <a:r>
+              <a:t>LECTURER CUE</a:t>
+            </a:r>
+          </a:p>
+          <a:p>
+            <a:r>
+              <a:t>In six months the person who cannot reproduce it will be you. The log costs five minutes while you work and saves an afternoon later, which is the best trade available in this course.</a:t>
+            </a:r>
+          </a:p>
+          <a:p>
+            <a:r>
+              <a:t/>
+            </a:r>
+          </a:p>
+          <a:p>
+            <a:r>
+              <a:t>EXPLAIN IN ORDINARY WORDS</a:t>
+            </a:r>
+          </a:p>
+          <a:p>
+            <a:r>
+              <a:t>A DataFrame is a labelled table. A Series is a single labelled sequence, often one column. A dtype describes stored values, but the import may infer something unsuitable.</a:t>
+            </a:r>
+          </a:p>
+          <a:p>
+            <a:r>
+              <a:t/>
+            </a:r>
+          </a:p>
+          <a:p>
+            <a:r>
+              <a:t>CHECK AND EXPECTED ANSWER</a:t>
+            </a:r>
+          </a:p>
+          <a:p>
+            <a:r>
+              <a:t>Does a price that looks numeric prove the column is numeric? No. Inspect its dtype and troublesome values before conversion.</a:t>
+            </a:r>
+          </a:p>
+          <a:p>
+            <a:r>
+              <a:t/>
+            </a:r>
+          </a:p>
+          <a:p>
+            <a:r>
+              <a:t>IF LEARNERS ARE STUCK</a:t>
+            </a:r>
+          </a:p>
+          <a:p>
+            <a:r>
+              <a:t>Use head, shape and dtypes to locate the table, count rows/columns and inspect storage. Check units and missing values before calculating.</a:t>
             </a:r>
           </a:p>
         </p:txBody>
@@ -1567,8 +2934,8 @@
 </p:notes>
 </file>
 
-<file path=ppt/notesSlides/notesSlide5.xml><?xml version="1.0" encoding="utf-8"?>
-<p:notes xmlns:a="http://schemas.openxmlformats.org/drawingml/2006/main" xmlns:p="http://schemas.openxmlformats.org/presentationml/2006/main" xmlns:r="http://schemas.openxmlformats.org/officeDocument/2006/relationships">
+<file path=ppt/notesSlides/notesSlide3.xml><?xml version="1.0" encoding="utf-8"?>
+<p:notes xmlns:a="http://schemas.openxmlformats.org/drawingml/2006/main" xmlns:p="http://schemas.openxmlformats.org/presentationml/2006/main">
   <p:cSld>
     <p:spTree>
       <p:nvGrpSpPr>
@@ -1612,7 +2979,87 @@
           <a:lstStyle/>
           <a:p>
             <a:r>
-              <a:t>Only if you wrote down what you changed. Cleaning is a series of decisions, and a decision nobody recorded is a number nobody can reproduce.</a:t>
+              <a:t>TEACHING PURPOSE</a:t>
+            </a:r>
+          </a:p>
+          <a:p>
+            <a:r>
+              <a:t>The words for tonight</a:t>
+            </a:r>
+          </a:p>
+          <a:p>
+            <a:r>
+              <a:t/>
+            </a:r>
+          </a:p>
+          <a:p>
+            <a:r>
+              <a:t>CONNECT</a:t>
+            </a:r>
+          </a:p>
+          <a:p>
+            <a:r>
+              <a:t>Build on the preceding slide: Where tonight sits.</a:t>
+            </a:r>
+          </a:p>
+          <a:p>
+            <a:r>
+              <a:t/>
+            </a:r>
+          </a:p>
+          <a:p>
+            <a:r>
+              <a:t>EXPLAIN IN ORDINARY WORDS</a:t>
+            </a:r>
+          </a:p>
+          <a:p>
+            <a:r>
+              <a:t>Grain means what one row represents. A key identifies a row; a primary key may use more than one column. A join matches keys, and multiple matches can multiply rows.</a:t>
+            </a:r>
+          </a:p>
+          <a:p>
+            <a:r>
+              <a:t/>
+            </a:r>
+          </a:p>
+          <a:p>
+            <a:r>
+              <a:t>CHECK AND EXPECTED ANSWER</a:t>
+            </a:r>
+          </a:p>
+          <a:p>
+            <a:r>
+              <a:t>One order has two lines. After joining orders to lines, how many rows for it? Two. Summing a repeated order-level total would double-count.</a:t>
+            </a:r>
+          </a:p>
+          <a:p>
+            <a:r>
+              <a:t/>
+            </a:r>
+          </a:p>
+          <a:p>
+            <a:r>
+              <a:t>IF LEARNERS ARE STUCK</a:t>
+            </a:r>
+          </a:p>
+          <a:p>
+            <a:r>
+              <a:t>Write one example row from each table. Circle keys and trace each match. Aggregate to the intended grain and check counts and totals.</a:t>
+            </a:r>
+          </a:p>
+          <a:p>
+            <a:r>
+              <a:t/>
+            </a:r>
+          </a:p>
+          <a:p>
+            <a:r>
+              <a:t>NEXT</a:t>
+            </a:r>
+          </a:p>
+          <a:p>
+            <a:r>
+              <a:t>By the end of tonight you can…. Move on after a learner can explain the current example or required action.</a:t>
             </a:r>
           </a:p>
         </p:txBody>
@@ -1637,8 +3084,8 @@
 </p:notes>
 </file>
 
-<file path=ppt/notesSlides/notesSlide6.xml><?xml version="1.0" encoding="utf-8"?>
-<p:notes xmlns:a="http://schemas.openxmlformats.org/drawingml/2006/main" xmlns:p="http://schemas.openxmlformats.org/presentationml/2006/main" xmlns:r="http://schemas.openxmlformats.org/officeDocument/2006/relationships">
+<file path=ppt/notesSlides/notesSlide4.xml><?xml version="1.0" encoding="utf-8"?>
+<p:notes xmlns:a="http://schemas.openxmlformats.org/drawingml/2006/main" xmlns:p="http://schemas.openxmlformats.org/presentationml/2006/main">
   <p:cSld>
     <p:spTree>
       <p:nvGrpSpPr>
@@ -1680,7 +3127,106 @@
         <p:txBody>
           <a:bodyPr/>
           <a:lstStyle/>
-          <a:p/>
+          <a:p>
+            <a:r>
+              <a:t>TEACHING PURPOSE</a:t>
+            </a:r>
+          </a:p>
+          <a:p>
+            <a:r>
+              <a:t>By the end of tonight you can…</a:t>
+            </a:r>
+          </a:p>
+          <a:p>
+            <a:r>
+              <a:t/>
+            </a:r>
+          </a:p>
+          <a:p>
+            <a:r>
+              <a:t>CONNECT</a:t>
+            </a:r>
+          </a:p>
+          <a:p>
+            <a:r>
+              <a:t>Build on the preceding slide: The words for tonight.</a:t>
+            </a:r>
+          </a:p>
+          <a:p>
+            <a:r>
+              <a:t/>
+            </a:r>
+          </a:p>
+          <a:p>
+            <a:r>
+              <a:t>LECTURER CUE</a:t>
+            </a:r>
+          </a:p>
+          <a:p>
+            <a:r>
+              <a:t>These three are what tonight is marked against, in the sense that the lab checks them.</a:t>
+            </a:r>
+          </a:p>
+          <a:p>
+            <a:r>
+              <a:t/>
+            </a:r>
+          </a:p>
+          <a:p>
+            <a:r>
+              <a:t>EXPLAIN IN ORDINARY WORDS</a:t>
+            </a:r>
+          </a:p>
+          <a:p>
+            <a:r>
+              <a:t>Missing means not recorded, not automatically zero. Decide why it is missing and document the rule. Fitted fill values must come from training data when evaluating a model.</a:t>
+            </a:r>
+          </a:p>
+          <a:p>
+            <a:r>
+              <a:t/>
+            </a:r>
+          </a:p>
+          <a:p>
+            <a:r>
+              <a:t>CHECK AND EXPECTED ANSWER</a:t>
+            </a:r>
+          </a:p>
+          <a:p>
+            <a:r>
+              <a:t>Is an unrecorded energy reading evidence of zero consumption? No.</a:t>
+            </a:r>
+          </a:p>
+          <a:p>
+            <a:r>
+              <a:t/>
+            </a:r>
+          </a:p>
+          <a:p>
+            <a:r>
+              <a:t>IF LEARNERS ARE STUCK</a:t>
+            </a:r>
+          </a:p>
+          <a:p>
+            <a:r>
+              <a:t>Use three rows: a recorded zero, a recorded positive value and a blank. Explain their different meanings before cleaning.</a:t>
+            </a:r>
+          </a:p>
+          <a:p>
+            <a:r>
+              <a:t/>
+            </a:r>
+          </a:p>
+          <a:p>
+            <a:r>
+              <a:t>NEXT</a:t>
+            </a:r>
+          </a:p>
+          <a:p>
+            <a:r>
+              <a:t>You cleaned the data and got a number.. Move on after a learner can explain the current example or required action.</a:t>
+            </a:r>
+          </a:p>
         </p:txBody>
       </p:sp>
       <p:sp>
@@ -1703,8 +3249,8 @@
 </p:notes>
 </file>
 
-<file path=ppt/notesSlides/notesSlide7.xml><?xml version="1.0" encoding="utf-8"?>
-<p:notes xmlns:a="http://schemas.openxmlformats.org/drawingml/2006/main" xmlns:p="http://schemas.openxmlformats.org/presentationml/2006/main" xmlns:r="http://schemas.openxmlformats.org/officeDocument/2006/relationships">
+<file path=ppt/notesSlides/notesSlide5.xml><?xml version="1.0" encoding="utf-8"?>
+<p:notes xmlns:a="http://schemas.openxmlformats.org/drawingml/2006/main" xmlns:p="http://schemas.openxmlformats.org/presentationml/2006/main">
   <p:cSld>
     <p:spTree>
       <p:nvGrpSpPr>
@@ -1748,7 +3294,102 @@
           <a:lstStyle/>
           <a:p>
             <a:r>
-              <a:t>A table recording rows in, rows out, what changed and why, written as you work rather than afterwards.</a:t>
+              <a:t>TEACHING PURPOSE</a:t>
+            </a:r>
+          </a:p>
+          <a:p>
+            <a:r>
+              <a:t>You cleaned the data and got a number.</a:t>
+            </a:r>
+          </a:p>
+          <a:p>
+            <a:r>
+              <a:t/>
+            </a:r>
+          </a:p>
+          <a:p>
+            <a:r>
+              <a:t>CONNECT</a:t>
+            </a:r>
+          </a:p>
+          <a:p>
+            <a:r>
+              <a:t>Build on the preceding slide: By the end of tonight you can….</a:t>
+            </a:r>
+          </a:p>
+          <a:p>
+            <a:r>
+              <a:t/>
+            </a:r>
+          </a:p>
+          <a:p>
+            <a:r>
+              <a:t>LECTURER CUE</a:t>
+            </a:r>
+          </a:p>
+          <a:p>
+            <a:r>
+              <a:t>Only if you wrote down what you changed. Cleaning is a series of decisions, and a decision nobody recorded is a number nobody can reproduce.</a:t>
+            </a:r>
+          </a:p>
+          <a:p>
+            <a:r>
+              <a:t/>
+            </a:r>
+          </a:p>
+          <a:p>
+            <a:r>
+              <a:t>EXPLAIN IN ORDINARY WORDS</a:t>
+            </a:r>
+          </a:p>
+          <a:p>
+            <a:r>
+              <a:t>A cleaning decision needs evidence, a stated rule and a before/after check. Similar rows may be genuine repeated events. Reconciliation compares totals built under the same definitions.</a:t>
+            </a:r>
+          </a:p>
+          <a:p>
+            <a:r>
+              <a:t/>
+            </a:r>
+          </a:p>
+          <a:p>
+            <a:r>
+              <a:t>CHECK AND EXPECTED ANSWER</a:t>
+            </a:r>
+          </a:p>
+          <a:p>
+            <a:r>
+              <a:t>May we delete every repeated amount? No. Check the row identifier and the table grain first.</a:t>
+            </a:r>
+          </a:p>
+          <a:p>
+            <a:r>
+              <a:t/>
+            </a:r>
+          </a:p>
+          <a:p>
+            <a:r>
+              <a:t>IF LEARNERS ARE STUCK</a:t>
+            </a:r>
+          </a:p>
+          <a:p>
+            <a:r>
+              <a:t>Keep raw data, record counts before and after each action, then explain any remaining difference instead of forcing totals to agree.</a:t>
+            </a:r>
+          </a:p>
+          <a:p>
+            <a:r>
+              <a:t/>
+            </a:r>
+          </a:p>
+          <a:p>
+            <a:r>
+              <a:t>NEXT</a:t>
+            </a:r>
+          </a:p>
+          <a:p>
+            <a:r>
+              <a:t>Seven defects, found and fixed. Move on after a learner can explain the current example or required action.</a:t>
             </a:r>
           </a:p>
         </p:txBody>
@@ -1773,8 +3414,8 @@
 </p:notes>
 </file>
 
-<file path=ppt/notesSlides/notesSlide8.xml><?xml version="1.0" encoding="utf-8"?>
-<p:notes xmlns:a="http://schemas.openxmlformats.org/drawingml/2006/main" xmlns:p="http://schemas.openxmlformats.org/presentationml/2006/main" xmlns:r="http://schemas.openxmlformats.org/officeDocument/2006/relationships">
+<file path=ppt/notesSlides/notesSlide6.xml><?xml version="1.0" encoding="utf-8"?>
+<p:notes xmlns:a="http://schemas.openxmlformats.org/drawingml/2006/main" xmlns:p="http://schemas.openxmlformats.org/presentationml/2006/main">
   <p:cSld>
     <p:spTree>
       <p:nvGrpSpPr>
@@ -1818,7 +3459,87 @@
           <a:lstStyle/>
           <a:p>
             <a:r>
-              <a:t>Getting the same number two different ways and chasing every difference until you can name it.</a:t>
+              <a:t>TEACHING PURPOSE</a:t>
+            </a:r>
+          </a:p>
+          <a:p>
+            <a:r>
+              <a:t>The seven defects in tonight's file, and what each one costs</a:t>
+            </a:r>
+          </a:p>
+          <a:p>
+            <a:r>
+              <a:t/>
+            </a:r>
+          </a:p>
+          <a:p>
+            <a:r>
+              <a:t>CONNECT</a:t>
+            </a:r>
+          </a:p>
+          <a:p>
+            <a:r>
+              <a:t>Build on the preceding slide: Seven defects, found and fixed.</a:t>
+            </a:r>
+          </a:p>
+          <a:p>
+            <a:r>
+              <a:t/>
+            </a:r>
+          </a:p>
+          <a:p>
+            <a:r>
+              <a:t>EXPLAIN IN ORDINARY WORDS</a:t>
+            </a:r>
+          </a:p>
+          <a:p>
+            <a:r>
+              <a:t>Grouping puts rows sharing a key into buckets, then computes a result for each bucket. WHERE filters rows before SQL grouping; HAVING filters grouped results.</a:t>
+            </a:r>
+          </a:p>
+          <a:p>
+            <a:r>
+              <a:t/>
+            </a:r>
+          </a:p>
+          <a:p>
+            <a:r>
+              <a:t>CHECK AND EXPECTED ANSWER</a:t>
+            </a:r>
+          </a:p>
+          <a:p>
+            <a:r>
+              <a:t>Which condition keeps only groups with more than five rows? HAVING COUNT(*) &gt; 5.</a:t>
+            </a:r>
+          </a:p>
+          <a:p>
+            <a:r>
+              <a:t/>
+            </a:r>
+          </a:p>
+          <a:p>
+            <a:r>
+              <a:t>IF LEARNERS ARE STUCK</a:t>
+            </a:r>
+          </a:p>
+          <a:p>
+            <a:r>
+              <a:t>Draw two buckets and count by hand. Name the intended output grain before writing the aggregation.</a:t>
+            </a:r>
+          </a:p>
+          <a:p>
+            <a:r>
+              <a:t/>
+            </a:r>
+          </a:p>
+          <a:p>
+            <a:r>
+              <a:t>NEXT</a:t>
+            </a:r>
+          </a:p>
+          <a:p>
+            <a:r>
+              <a:t>A cleaning log. Move on after a learner can explain the current example or required action.</a:t>
             </a:r>
           </a:p>
         </p:txBody>
@@ -1843,8 +3564,8 @@
 </p:notes>
 </file>
 
-<file path=ppt/notesSlides/notesSlide9.xml><?xml version="1.0" encoding="utf-8"?>
-<p:notes xmlns:a="http://schemas.openxmlformats.org/drawingml/2006/main" xmlns:p="http://schemas.openxmlformats.org/presentationml/2006/main" xmlns:r="http://schemas.openxmlformats.org/officeDocument/2006/relationships">
+<file path=ppt/notesSlides/notesSlide7.xml><?xml version="1.0" encoding="utf-8"?>
+<p:notes xmlns:a="http://schemas.openxmlformats.org/drawingml/2006/main" xmlns:p="http://schemas.openxmlformats.org/presentationml/2006/main">
   <p:cSld>
     <p:spTree>
       <p:nvGrpSpPr>
@@ -1888,7 +3609,432 @@
           <a:lstStyle/>
           <a:p>
             <a:r>
+              <a:t>TEACHING PURPOSE</a:t>
+            </a:r>
+          </a:p>
+          <a:p>
+            <a:r>
+              <a:t>A cleaning log</a:t>
+            </a:r>
+          </a:p>
+          <a:p>
+            <a:r>
+              <a:t/>
+            </a:r>
+          </a:p>
+          <a:p>
+            <a:r>
+              <a:t>CONNECT</a:t>
+            </a:r>
+          </a:p>
+          <a:p>
+            <a:r>
+              <a:t>Build on the preceding slide: The seven defects in tonight's file, and what each one costs.</a:t>
+            </a:r>
+          </a:p>
+          <a:p>
+            <a:r>
+              <a:t/>
+            </a:r>
+          </a:p>
+          <a:p>
+            <a:r>
+              <a:t>LECTURER CUE</a:t>
+            </a:r>
+          </a:p>
+          <a:p>
+            <a:r>
+              <a:t>A table recording rows in, rows out, what changed and why, written as you work rather than afterwards.</a:t>
+            </a:r>
+          </a:p>
+          <a:p>
+            <a:r>
+              <a:t/>
+            </a:r>
+          </a:p>
+          <a:p>
+            <a:r>
+              <a:t>EXPLAIN IN ORDINARY WORDS</a:t>
+            </a:r>
+          </a:p>
+          <a:p>
+            <a:r>
+              <a:t>A cleaning decision needs evidence, a stated rule and a before/after check. Similar rows may be genuine repeated events. Reconciliation compares totals built under the same definitions.</a:t>
+            </a:r>
+          </a:p>
+          <a:p>
+            <a:r>
+              <a:t/>
+            </a:r>
+          </a:p>
+          <a:p>
+            <a:r>
+              <a:t>CHECK AND EXPECTED ANSWER</a:t>
+            </a:r>
+          </a:p>
+          <a:p>
+            <a:r>
+              <a:t>May we delete every repeated amount? No. Check the row identifier and the table grain first.</a:t>
+            </a:r>
+          </a:p>
+          <a:p>
+            <a:r>
+              <a:t/>
+            </a:r>
+          </a:p>
+          <a:p>
+            <a:r>
+              <a:t>IF LEARNERS ARE STUCK</a:t>
+            </a:r>
+          </a:p>
+          <a:p>
+            <a:r>
+              <a:t>Keep raw data, record counts before and after each action, then explain any remaining difference instead of forcing totals to agree.</a:t>
+            </a:r>
+          </a:p>
+          <a:p>
+            <a:r>
+              <a:t/>
+            </a:r>
+          </a:p>
+          <a:p>
+            <a:r>
+              <a:t>NEXT</a:t>
+            </a:r>
+          </a:p>
+          <a:p>
+            <a:r>
+              <a:t>Reconciliation. Move on after a learner can explain the current example or required action.</a:t>
+            </a:r>
+          </a:p>
+        </p:txBody>
+      </p:sp>
+      <p:sp>
+        <p:nvSpPr>
+          <p:cNvPr id="4" name="Slide Number Placeholder 3"/>
+          <p:cNvSpPr>
+            <a:spLocks noGrp="1"/>
+          </p:cNvSpPr>
+          <p:nvPr>
+            <p:ph type="sldNum" idx="5" sz="quarter"/>
+          </p:nvPr>
+        </p:nvSpPr>
+        <p:spPr/>
+      </p:sp>
+    </p:spTree>
+  </p:cSld>
+  <p:clrMapOvr>
+    <a:masterClrMapping/>
+  </p:clrMapOvr>
+</p:notes>
+</file>
+
+<file path=ppt/notesSlides/notesSlide8.xml><?xml version="1.0" encoding="utf-8"?>
+<p:notes xmlns:a="http://schemas.openxmlformats.org/drawingml/2006/main" xmlns:p="http://schemas.openxmlformats.org/presentationml/2006/main">
+  <p:cSld>
+    <p:spTree>
+      <p:nvGrpSpPr>
+        <p:cNvPr id="1" name=""/>
+        <p:cNvGrpSpPr/>
+        <p:nvPr/>
+      </p:nvGrpSpPr>
+      <p:grpSpPr>
+        <a:xfrm>
+          <a:off x="0" y="0"/>
+          <a:ext cx="0" cy="0"/>
+          <a:chOff x="0" y="0"/>
+          <a:chExt cx="0" cy="0"/>
+        </a:xfrm>
+      </p:grpSpPr>
+      <p:sp>
+        <p:nvSpPr>
+          <p:cNvPr id="2" name="Slide Image Placeholder 1"/>
+          <p:cNvSpPr>
+            <a:spLocks noGrp="1"/>
+          </p:cNvSpPr>
+          <p:nvPr>
+            <p:ph type="sldImg" idx="2"/>
+          </p:nvPr>
+        </p:nvSpPr>
+        <p:spPr/>
+      </p:sp>
+      <p:sp>
+        <p:nvSpPr>
+          <p:cNvPr id="3" name="Notes Placeholder 2"/>
+          <p:cNvSpPr>
+            <a:spLocks noGrp="1"/>
+          </p:cNvSpPr>
+          <p:nvPr>
+            <p:ph type="body" idx="3" sz="quarter"/>
+          </p:nvPr>
+        </p:nvSpPr>
+        <p:spPr/>
+        <p:txBody>
+          <a:bodyPr/>
+          <a:lstStyle/>
+          <a:p>
+            <a:r>
+              <a:t>TEACHING PURPOSE</a:t>
+            </a:r>
+          </a:p>
+          <a:p>
+            <a:r>
+              <a:t>Reconciliation</a:t>
+            </a:r>
+          </a:p>
+          <a:p>
+            <a:r>
+              <a:t/>
+            </a:r>
+          </a:p>
+          <a:p>
+            <a:r>
+              <a:t>CONNECT</a:t>
+            </a:r>
+          </a:p>
+          <a:p>
+            <a:r>
+              <a:t>Build on the preceding slide: A cleaning log.</a:t>
+            </a:r>
+          </a:p>
+          <a:p>
+            <a:r>
+              <a:t/>
+            </a:r>
+          </a:p>
+          <a:p>
+            <a:r>
+              <a:t>LECTURER CUE</a:t>
+            </a:r>
+          </a:p>
+          <a:p>
+            <a:r>
+              <a:t>Getting the same number two different ways and chasing every difference until you can name it.</a:t>
+            </a:r>
+          </a:p>
+          <a:p>
+            <a:r>
+              <a:t/>
+            </a:r>
+          </a:p>
+          <a:p>
+            <a:r>
+              <a:t>EXPLAIN IN ORDINARY WORDS</a:t>
+            </a:r>
+          </a:p>
+          <a:p>
+            <a:r>
+              <a:t>A cleaning decision needs evidence, a stated rule and a before/after check. Similar rows may be genuine repeated events. Reconciliation compares totals built under the same definitions.</a:t>
+            </a:r>
+          </a:p>
+          <a:p>
+            <a:r>
+              <a:t/>
+            </a:r>
+          </a:p>
+          <a:p>
+            <a:r>
+              <a:t>CHECK AND EXPECTED ANSWER</a:t>
+            </a:r>
+          </a:p>
+          <a:p>
+            <a:r>
+              <a:t>May we delete every repeated amount? No. Check the row identifier and the table grain first.</a:t>
+            </a:r>
+          </a:p>
+          <a:p>
+            <a:r>
+              <a:t/>
+            </a:r>
+          </a:p>
+          <a:p>
+            <a:r>
+              <a:t>IF LEARNERS ARE STUCK</a:t>
+            </a:r>
+          </a:p>
+          <a:p>
+            <a:r>
+              <a:t>Keep raw data, record counts before and after each action, then explain any remaining difference instead of forcing totals to agree.</a:t>
+            </a:r>
+          </a:p>
+          <a:p>
+            <a:r>
+              <a:t/>
+            </a:r>
+          </a:p>
+          <a:p>
+            <a:r>
+              <a:t>NEXT</a:t>
+            </a:r>
+          </a:p>
+          <a:p>
+            <a:r>
+              <a:t>Residual. Move on after a learner can explain the current example or required action.</a:t>
+            </a:r>
+          </a:p>
+        </p:txBody>
+      </p:sp>
+      <p:sp>
+        <p:nvSpPr>
+          <p:cNvPr id="4" name="Slide Number Placeholder 3"/>
+          <p:cNvSpPr>
+            <a:spLocks noGrp="1"/>
+          </p:cNvSpPr>
+          <p:nvPr>
+            <p:ph type="sldNum" idx="5" sz="quarter"/>
+          </p:nvPr>
+        </p:nvSpPr>
+        <p:spPr/>
+      </p:sp>
+    </p:spTree>
+  </p:cSld>
+  <p:clrMapOvr>
+    <a:masterClrMapping/>
+  </p:clrMapOvr>
+</p:notes>
+</file>
+
+<file path=ppt/notesSlides/notesSlide9.xml><?xml version="1.0" encoding="utf-8"?>
+<p:notes xmlns:a="http://schemas.openxmlformats.org/drawingml/2006/main" xmlns:p="http://schemas.openxmlformats.org/presentationml/2006/main">
+  <p:cSld>
+    <p:spTree>
+      <p:nvGrpSpPr>
+        <p:cNvPr id="1" name=""/>
+        <p:cNvGrpSpPr/>
+        <p:nvPr/>
+      </p:nvGrpSpPr>
+      <p:grpSpPr>
+        <a:xfrm>
+          <a:off x="0" y="0"/>
+          <a:ext cx="0" cy="0"/>
+          <a:chOff x="0" y="0"/>
+          <a:chExt cx="0" cy="0"/>
+        </a:xfrm>
+      </p:grpSpPr>
+      <p:sp>
+        <p:nvSpPr>
+          <p:cNvPr id="2" name="Slide Image Placeholder 1"/>
+          <p:cNvSpPr>
+            <a:spLocks noGrp="1"/>
+          </p:cNvSpPr>
+          <p:nvPr>
+            <p:ph type="sldImg" idx="2"/>
+          </p:nvPr>
+        </p:nvSpPr>
+        <p:spPr/>
+      </p:sp>
+      <p:sp>
+        <p:nvSpPr>
+          <p:cNvPr id="3" name="Notes Placeholder 2"/>
+          <p:cNvSpPr>
+            <a:spLocks noGrp="1"/>
+          </p:cNvSpPr>
+          <p:nvPr>
+            <p:ph type="body" idx="3" sz="quarter"/>
+          </p:nvPr>
+        </p:nvSpPr>
+        <p:spPr/>
+        <p:txBody>
+          <a:bodyPr/>
+          <a:lstStyle/>
+          <a:p>
+            <a:r>
+              <a:t>TEACHING PURPOSE</a:t>
+            </a:r>
+          </a:p>
+          <a:p>
+            <a:r>
+              <a:t>Residual</a:t>
+            </a:r>
+          </a:p>
+          <a:p>
+            <a:r>
+              <a:t/>
+            </a:r>
+          </a:p>
+          <a:p>
+            <a:r>
+              <a:t>CONNECT</a:t>
+            </a:r>
+          </a:p>
+          <a:p>
+            <a:r>
+              <a:t>Build on the preceding slide: Reconciliation.</a:t>
+            </a:r>
+          </a:p>
+          <a:p>
+            <a:r>
+              <a:t/>
+            </a:r>
+          </a:p>
+          <a:p>
+            <a:r>
+              <a:t>LECTURER CUE</a:t>
+            </a:r>
+          </a:p>
+          <a:p>
+            <a:r>
               <a:t>The difference left after you have explained everything you can. Naming it is part of the job.</a:t>
+            </a:r>
+          </a:p>
+          <a:p>
+            <a:r>
+              <a:t/>
+            </a:r>
+          </a:p>
+          <a:p>
+            <a:r>
+              <a:t>EXPLAIN IN ORDINARY WORDS</a:t>
+            </a:r>
+          </a:p>
+          <a:p>
+            <a:r>
+              <a:t>A cleaning decision needs evidence, a stated rule and a before/after check. Similar rows may be genuine repeated events. Reconciliation compares totals built under the same definitions.</a:t>
+            </a:r>
+          </a:p>
+          <a:p>
+            <a:r>
+              <a:t/>
+            </a:r>
+          </a:p>
+          <a:p>
+            <a:r>
+              <a:t>CHECK AND EXPECTED ANSWER</a:t>
+            </a:r>
+          </a:p>
+          <a:p>
+            <a:r>
+              <a:t>May we delete every repeated amount? No. Check the row identifier and the table grain first.</a:t>
+            </a:r>
+          </a:p>
+          <a:p>
+            <a:r>
+              <a:t/>
+            </a:r>
+          </a:p>
+          <a:p>
+            <a:r>
+              <a:t>IF LEARNERS ARE STUCK</a:t>
+            </a:r>
+          </a:p>
+          <a:p>
+            <a:r>
+              <a:t>Keep raw data, record counts before and after each action, then explain any remaining difference instead of forcing totals to agree.</a:t>
+            </a:r>
+          </a:p>
+          <a:p>
+            <a:r>
+              <a:t/>
+            </a:r>
+          </a:p>
+          <a:p>
+            <a:r>
+              <a:t>NEXT</a:t>
+            </a:r>
+          </a:p>
+          <a:p>
+            <a:r>
+              <a:t>Duplicates, and the returns convention. Move on after a learner can explain the current example or required action.</a:t>
             </a:r>
           </a:p>
         </p:txBody>
@@ -6290,7 +8436,7 @@
                 </a:solidFill>
                 <a:latin typeface="Calibri"/>
               </a:rPr>
-              <a:t>The decision, not the code, is the work. Dropping a row, filling a value and leaving it alone are three defensible choices with different consequences, and the choice belongs in writing beside the number. Then the log, a</a:t>
+              <a:t>The decision, not the code, is the work.</a:t>
             </a:r>
           </a:p>
         </p:txBody>
@@ -7965,7 +10111,7 @@
         <p:spPr>
           <a:xfrm>
             <a:off x="685800" y="1600200"/>
-            <a:ext cx="10820095" cy="1100371"/>
+            <a:ext cx="10820095" cy="1603291"/>
           </a:xfrm>
           <a:prstGeom prst="rect">
             <a:avLst/>
@@ -8006,7 +10152,7 @@
         </p:nvSpPr>
         <p:spPr>
           <a:xfrm>
-            <a:off x="685800" y="2792011"/>
+            <a:off x="685800" y="3477811"/>
             <a:ext cx="10820095" cy="457200"/>
           </a:xfrm>
           <a:prstGeom prst="rect">
@@ -11112,7 +13258,7 @@
         <p:spPr>
           <a:xfrm>
             <a:off x="685800" y="1911095"/>
-            <a:ext cx="10820095" cy="969264"/>
+            <a:ext cx="10820095" cy="1236629"/>
           </a:xfrm>
           <a:prstGeom prst="roundRect">
             <a:avLst>
@@ -11157,7 +13303,7 @@
         <p:spPr>
           <a:xfrm>
             <a:off x="978408" y="2112264"/>
-            <a:ext cx="10234879" cy="603504"/>
+            <a:ext cx="10234879" cy="870869"/>
           </a:xfrm>
           <a:prstGeom prst="rect">
             <a:avLst/>
@@ -11198,7 +13344,7 @@
         </p:nvSpPr>
         <p:spPr>
           <a:xfrm>
-            <a:off x="685800" y="3191256"/>
+            <a:off x="685800" y="3422045"/>
             <a:ext cx="10820095" cy="310896"/>
           </a:xfrm>
           <a:prstGeom prst="rect">
@@ -11224,7 +13370,7 @@
                 </a:solidFill>
                 <a:latin typeface="Calibri"/>
               </a:rPr>
-              <a:t>Work these questions in order:</a:t>
+              <a:t>Work these questions in order</a:t>
             </a:r>
           </a:p>
         </p:txBody>
@@ -11237,8 +13383,8 @@
         </p:nvSpPr>
         <p:spPr>
           <a:xfrm>
-            <a:off x="685800" y="3611879"/>
-            <a:ext cx="5227167" cy="365760"/>
+            <a:off x="685800" y="3897533"/>
+            <a:ext cx="5227167" cy="697851"/>
           </a:xfrm>
           <a:prstGeom prst="rect">
             <a:avLst/>
@@ -11266,7 +13412,7 @@
                 </a:solidFill>
                 <a:latin typeface="Calibri"/>
               </a:rPr>
-              <a:t>→  Profile first. Rows in, and what you expect rows out to be.</a:t>
+              <a:t>Profile first. Rows in, and what you expect rows out to be.</a:t>
             </a:r>
           </a:p>
         </p:txBody>
@@ -11279,8 +13425,8 @@
         </p:nvSpPr>
         <p:spPr>
           <a:xfrm>
-            <a:off x="685800" y="4032504"/>
-            <a:ext cx="5227167" cy="365760"/>
+            <a:off x="685800" y="4686824"/>
+            <a:ext cx="5227167" cy="697851"/>
           </a:xfrm>
           <a:prstGeom prst="rect">
             <a:avLst/>
@@ -11308,7 +13454,7 @@
                 </a:solidFill>
                 <a:latin typeface="Calibri"/>
               </a:rPr>
-              <a:t>→  Work the seven defects. Two lines to find each, two to fix it.</a:t>
+              <a:t>Work the seven defects. Two lines to find each, two to fix it.</a:t>
             </a:r>
           </a:p>
         </p:txBody>
@@ -11321,8 +13467,8 @@
         </p:nvSpPr>
         <p:spPr>
           <a:xfrm>
-            <a:off x="685800" y="4453128"/>
-            <a:ext cx="5227167" cy="365760"/>
+            <a:off x="685800" y="5476116"/>
+            <a:ext cx="5227167" cy="697851"/>
           </a:xfrm>
           <a:prstGeom prst="rect">
             <a:avLst/>
@@ -11350,7 +13496,7 @@
                 </a:solidFill>
                 <a:latin typeface="Calibri"/>
               </a:rPr>
-              <a:t>→  Keep the log: rows before, rows after, what changed, why.</a:t>
+              <a:t>Keep the log: rows before, rows after, what changed, why.</a:t>
             </a:r>
           </a:p>
         </p:txBody>
@@ -11363,8 +13509,8 @@
         </p:nvSpPr>
         <p:spPr>
           <a:xfrm>
-            <a:off x="6278727" y="3611879"/>
-            <a:ext cx="5227167" cy="365760"/>
+            <a:off x="6278727" y="3897533"/>
+            <a:ext cx="5227167" cy="697851"/>
           </a:xfrm>
           <a:prstGeom prst="rect">
             <a:avLst/>
@@ -11392,7 +13538,7 @@
                 </a:solidFill>
                 <a:latin typeface="Calibri"/>
               </a:rPr>
-              <a:t>→  Reconcile against UGX 8,751,672,145 and name your residual.</a:t>
+              <a:t>Reconcile against UGX 8,751,672,145 and name your residual.</a:t>
             </a:r>
           </a:p>
         </p:txBody>
@@ -11405,8 +13551,8 @@
         </p:nvSpPr>
         <p:spPr>
           <a:xfrm>
-            <a:off x="6278727" y="4032504"/>
-            <a:ext cx="5227167" cy="365760"/>
+            <a:off x="6278727" y="4686824"/>
+            <a:ext cx="5227167" cy="385501"/>
           </a:xfrm>
           <a:prstGeom prst="rect">
             <a:avLst/>
@@ -11434,7 +13580,7 @@
                 </a:solidFill>
                 <a:latin typeface="Calibri"/>
               </a:rPr>
-              <a:t>→  State one decision you are not sure about, and why.</a:t>
+              <a:t>State one decision you are not sure about, and why.</a:t>
             </a:r>
           </a:p>
         </p:txBody>
@@ -11447,8 +13593,8 @@
         </p:nvSpPr>
         <p:spPr>
           <a:xfrm>
-            <a:off x="6278727" y="4453128"/>
-            <a:ext cx="5227167" cy="365760"/>
+            <a:off x="6278727" y="5163766"/>
+            <a:ext cx="5227167" cy="385501"/>
           </a:xfrm>
           <a:prstGeom prst="rect">
             <a:avLst/>
@@ -11476,7 +13622,7 @@
                 </a:solidFill>
                 <a:latin typeface="Calibri"/>
               </a:rPr>
-              <a:t>→  Restart and Run All before you submit.</a:t>
+              <a:t>Restart and Run All before you submit.</a:t>
             </a:r>
           </a:p>
         </p:txBody>
@@ -13955,7 +16101,7 @@
                 </a:solidFill>
                 <a:latin typeface="Calibri"/>
               </a:rPr>
-              <a:t>Seven defects, on data where the right answer is known: duplicate rows, returns recorded as negative quantities, one category priced in dollars, discounts typed as percentages, two date formats in one column, messy custo</a:t>
+              <a:t>Seven defects, on data where the right answer is known: duplicate rows, returns recorded as negative quantities, one category priced in dollars, discounts typed as percentages, two date formats in one column, messy customer names, and missing customer ids.</a:t>
             </a:r>
           </a:p>
         </p:txBody>
